--- a/presentation.pptx
+++ b/presentation.pptx
@@ -147,6 +147,7 @@
   <p1510:revLst>
     <p1510:client id="{0AB7B4DD-63E2-84DD-D784-6E51969B1E35}" v="12" dt="2026-06-30T08:03:17.450"/>
     <p1510:client id="{158D1456-7870-D11E-97D8-6E9EBAC48770}" v="349" dt="2026-06-29T22:06:57.226"/>
+    <p1510:client id="{1AF9B77E-919C-5B3F-B1C0-24E04377A057}" v="127" dt="2026-06-30T16:48:58.315"/>
     <p1510:client id="{2DC103A4-8F2A-46DD-A601-2DA978F32EDE}" v="51" dt="2026-06-29T21:55:52.170"/>
     <p1510:client id="{330F3A55-33BF-3E27-FA4D-C58802BE803A}" v="16" dt="2026-06-30T06:37:31.321"/>
     <p1510:client id="{56406C3E-FF77-5E71-1909-2EE501EA9EA5}" v="469" dt="2026-06-29T21:46:03.202"/>
@@ -4307,7 +4308,7 @@
                 <a:latin typeface="Arial"/>
                 <a:cs typeface="Arial"/>
               </a:rPr>
-              <a:t>Under the guidance of: Alexander Elias Krause </a:t>
+              <a:t>Under the guidance of: Dr. -Ing. Alexander Elias Krause </a:t>
             </a:r>
           </a:p>
           <a:p>
@@ -4919,7 +4920,7 @@
               </a:rPr>
               <a:t>Net positions gained depend strongly on starting grid position, with drivers further back having greater opportunity to gain places</a:t>
             </a:r>
-            <a:endParaRPr lang="en-US">
+            <a:endParaRPr lang="en-US" sz="1200">
               <a:latin typeface="Arial"/>
               <a:cs typeface="Arial"/>
             </a:endParaRPr>
@@ -5474,7 +5475,7 @@
         </p:nvSpPr>
         <p:spPr>
           <a:xfrm>
-            <a:off x="1201167" y="4077934"/>
+            <a:off x="1190281" y="4110591"/>
             <a:ext cx="6580414" cy="276999"/>
           </a:xfrm>
           <a:prstGeom prst="rect">
@@ -5549,7 +5550,7 @@
               <a:buChar char="•"/>
             </a:pPr>
             <a:r>
-              <a:rPr lang="en-US" sz="1200" dirty="0">
+              <a:rPr lang="en-US" sz="1200">
                 <a:solidFill>
                   <a:srgbClr val="3C4043"/>
                 </a:solidFill>
@@ -5557,20 +5558,9 @@
                 <a:ea typeface="+mn-lt"/>
                 <a:cs typeface="Arial"/>
               </a:rPr>
-              <a:t>Weaker cars tend to pit early and finish worse, so just comparing early and late stoppers </a:t>
-            </a:r>
-            <a:r>
-              <a:rPr lang="en-US" sz="1200">
-                <a:solidFill>
-                  <a:srgbClr val="3C4043"/>
-                </a:solidFill>
-                <a:latin typeface="Arial"/>
-                <a:ea typeface="+mn-lt"/>
-                <a:cs typeface="Arial"/>
-              </a:rPr>
-              <a:t>really compares cars, not strategies. </a:t>
-            </a:r>
-            <a:endParaRPr lang="en-US" sz="1200" dirty="0">
+              <a:t>Weaker cars tend to pit early and finish worse, so just comparing early and late stoppers really compares cars, not strategies. </a:t>
+            </a:r>
+            <a:endParaRPr lang="en-US" sz="1200">
               <a:solidFill>
                 <a:srgbClr val="000000"/>
               </a:solidFill>
@@ -5593,18 +5583,7 @@
                 <a:ea typeface="+mn-lt"/>
                 <a:cs typeface="Arial"/>
               </a:rPr>
-              <a:t>We measure the effect of the pit decision </a:t>
-            </a:r>
-            <a:r>
-              <a:rPr lang="en-US" sz="1200" dirty="0">
-                <a:solidFill>
-                  <a:srgbClr val="3C4043"/>
-                </a:solidFill>
-                <a:latin typeface="Arial"/>
-                <a:ea typeface="+mn-lt"/>
-                <a:cs typeface="Arial"/>
-              </a:rPr>
-              <a:t>itself, with car quality held equal.</a:t>
+              <a:t>We measure the effect of the pit decision itself, with car quality held equal.</a:t>
             </a:r>
             <a:endParaRPr lang="en-US" sz="1200">
               <a:latin typeface="Arial"/>
@@ -5617,7 +5596,7 @@
               <a:buFont typeface="Arial"/>
               <a:buChar char="•"/>
             </a:pPr>
-            <a:endParaRPr lang="en-US" sz="1200" dirty="0">
+            <a:endParaRPr lang="en-US" sz="1200">
               <a:latin typeface="Arial"/>
               <a:ea typeface="Calibri"/>
               <a:cs typeface="Arial"/>
@@ -6403,18 +6382,7 @@
                 <a:ea typeface="Arial" pitchFamily="34" charset="-122"/>
                 <a:cs typeface="Arial"/>
               </a:rPr>
-              <a:t>Car tier, grid slot, track </a:t>
-            </a:r>
-            <a:r>
-              <a:rPr lang="en-US" sz="1200" dirty="0">
-                <a:solidFill>
-                  <a:srgbClr val="3C4043"/>
-                </a:solidFill>
-                <a:latin typeface="Arial"/>
-                <a:ea typeface="Arial" pitchFamily="34" charset="-122"/>
-                <a:cs typeface="Arial"/>
-              </a:rPr>
-              <a:t>temperature and rainfall, all observed.</a:t>
+              <a:t>Car tier, grid slot, track temperature and rainfall, all observed.</a:t>
             </a:r>
             <a:endParaRPr lang="en-US" sz="1200">
               <a:latin typeface="Arial"/>
@@ -6426,7 +6394,7 @@
               <a:buNone/>
             </a:pPr>
             <a:r>
-              <a:rPr lang="en-US" sz="1400" dirty="0">
+              <a:rPr lang="en-US" sz="1400">
                 <a:solidFill>
                   <a:srgbClr val="000000"/>
                 </a:solidFill>
@@ -6465,7 +6433,7 @@
           </a:p>
           <a:p>
             <a:r>
-              <a:rPr lang="en-US" sz="1200" dirty="0">
+              <a:rPr lang="en-US" sz="1200">
                 <a:solidFill>
                   <a:srgbClr val="3C4043"/>
                 </a:solidFill>
@@ -6476,7 +6444,7 @@
               <a:t>We build up from a backdoor adjustment in </a:t>
             </a:r>
             <a:r>
-              <a:rPr lang="en-US" sz="1200" dirty="0" err="1">
+              <a:rPr lang="en-US" sz="1200" err="1">
                 <a:solidFill>
                   <a:srgbClr val="3C4043"/>
                 </a:solidFill>
@@ -6487,7 +6455,7 @@
               <a:t>DoWhy</a:t>
             </a:r>
             <a:r>
-              <a:rPr lang="en-US" sz="1200" dirty="0">
+              <a:rPr lang="en-US" sz="1200">
                 <a:solidFill>
                   <a:srgbClr val="3C4043"/>
                 </a:solidFill>
@@ -6498,7 +6466,7 @@
               <a:t>, to </a:t>
             </a:r>
             <a:r>
-              <a:rPr lang="en-US" sz="1200" dirty="0" err="1">
+              <a:rPr lang="en-US" sz="1200" err="1">
                 <a:solidFill>
                   <a:srgbClr val="3C4043"/>
                 </a:solidFill>
@@ -6509,7 +6477,7 @@
               <a:t>two way</a:t>
             </a:r>
             <a:r>
-              <a:rPr lang="en-US" sz="1200" dirty="0">
+              <a:rPr lang="en-US" sz="1200">
                 <a:solidFill>
                   <a:srgbClr val="3C4043"/>
                 </a:solidFill>
@@ -6529,7 +6497,7 @@
               <a:buNone/>
             </a:pPr>
             <a:r>
-              <a:rPr lang="en-US" sz="1400" dirty="0">
+              <a:rPr lang="en-US" sz="1400">
                 <a:solidFill>
                   <a:srgbClr val="000000"/>
                 </a:solidFill>
@@ -6576,18 +6544,7 @@
                 <a:ea typeface="Arial" pitchFamily="34" charset="-122"/>
                 <a:cs typeface="Arial"/>
               </a:rPr>
-              <a:t>A race fixed effect only </a:t>
-            </a:r>
-            <a:r>
-              <a:rPr lang="en-US" sz="1200" dirty="0">
-                <a:solidFill>
-                  <a:srgbClr val="3C4043"/>
-                </a:solidFill>
-                <a:latin typeface="Arial"/>
-                <a:ea typeface="Arial" pitchFamily="34" charset="-122"/>
-                <a:cs typeface="Arial"/>
-              </a:rPr>
-              <a:t>compares early and late stoppers inside the same race. That cancels weather, safety cars and anything else specific to the race, even things we never measured. About 70% of races have both kinds of stop, so the comparison is feasible.</a:t>
+              <a:t>A race fixed effect only compares early and late stoppers inside the same race. That cancels weather, safety cars and anything else specific to the race, even things we never measured. About 70% of races have both kinds of stop, so the comparison is feasible.</a:t>
             </a:r>
             <a:endParaRPr lang="en-US" sz="1200">
               <a:latin typeface="Arial"/>
@@ -7539,7 +7496,7 @@
               <a:t> The estimated effect remains negative across 30</a:t>
             </a:r>
             <a:br>
-              <a:rPr lang="en-US" sz="1200" dirty="0">
+              <a:rPr lang="en-US" sz="1200">
                 <a:latin typeface="Arial"/>
                 <a:ea typeface="+mn-lt"/>
                 <a:cs typeface="Arial"/>
@@ -7635,7 +7592,7 @@
               <a:t>Treated and control groups have good common support, with only </a:t>
             </a:r>
             <a:r>
-              <a:rPr lang="en-US" sz="1200" b="1" dirty="0">
+              <a:rPr lang="en-US" sz="1200" b="1">
                 <a:solidFill>
                   <a:srgbClr val="3C4043"/>
                 </a:solidFill>
@@ -7646,7 +7603,7 @@
               <a:t>7 of 660</a:t>
             </a:r>
             <a:r>
-              <a:rPr lang="en-US" sz="1200" dirty="0">
+              <a:rPr lang="en-US" sz="1200">
                 <a:solidFill>
                   <a:srgbClr val="3C4043"/>
                 </a:solidFill>
@@ -7656,7 +7613,7 @@
               </a:rPr>
               <a:t> observations outside it.</a:t>
             </a:r>
-            <a:endParaRPr lang="en-US" dirty="0">
+            <a:endParaRPr lang="en-US">
               <a:solidFill>
                 <a:srgbClr val="000000"/>
               </a:solidFill>
@@ -7685,7 +7642,7 @@
               <a:t>Inference:</a:t>
             </a:r>
             <a:r>
-              <a:rPr lang="en-US" sz="1200" dirty="0">
+              <a:rPr lang="en-US" sz="1200">
                 <a:solidFill>
                   <a:srgbClr val="3C4043"/>
                 </a:solidFill>
@@ -7695,7 +7652,7 @@
               </a:rPr>
               <a:t> Standard errors are clustered by race to account for within-race dependence.</a:t>
             </a:r>
-            <a:endParaRPr lang="en-US" dirty="0">
+            <a:endParaRPr lang="en-US">
               <a:latin typeface="Arial"/>
               <a:ea typeface="+mn-lt"/>
               <a:cs typeface="Arial"/>
@@ -7978,7 +7935,7 @@
             <a:pPr marL="0" indent="0">
               <a:buNone/>
             </a:pPr>
-            <a:endParaRPr lang="en-US" sz="1200" dirty="0">
+            <a:endParaRPr lang="en-US" sz="1200">
               <a:latin typeface="Arial"/>
               <a:cs typeface="Arial"/>
             </a:endParaRPr>
@@ -7999,7 +7956,7 @@
               <a:t>Before 30%: </a:t>
             </a:r>
             <a:r>
-              <a:rPr lang="en-US" sz="1200" b="1" dirty="0">
+              <a:rPr lang="en-US" sz="1200" b="1">
                 <a:latin typeface="Arial"/>
                 <a:ea typeface="Arial" pitchFamily="34" charset="-122"/>
                 <a:cs typeface="Arial"/>
@@ -8036,7 +7993,7 @@
               <a:t>30 to 50%: </a:t>
             </a:r>
             <a:r>
-              <a:rPr lang="en-US" sz="1200" b="1" dirty="0">
+              <a:rPr lang="en-US" sz="1200" b="1">
                 <a:latin typeface="Arial"/>
                 <a:ea typeface="Arial" pitchFamily="34" charset="-122"/>
                 <a:cs typeface="Arial"/>
@@ -8051,7 +8008,7 @@
               </a:rPr>
               <a:t>the sweet spot, about plus 0.8 positions.</a:t>
             </a:r>
-            <a:endParaRPr lang="en-US" sz="1200" dirty="0">
+            <a:endParaRPr lang="en-US" sz="1200">
               <a:latin typeface="Arial"/>
               <a:cs typeface="Arial"/>
             </a:endParaRPr>
@@ -8079,7 +8036,7 @@
               </a:rPr>
               <a:t>the gain fades away again.</a:t>
             </a:r>
-            <a:endParaRPr lang="en-US" sz="1200" dirty="0">
+            <a:endParaRPr lang="en-US" sz="1200">
               <a:latin typeface="Arial"/>
               <a:cs typeface="Arial"/>
             </a:endParaRPr>
@@ -8089,7 +8046,7 @@
               <a:buNone/>
             </a:pPr>
             <a:r>
-              <a:rPr lang="en-US" sz="1200" dirty="0">
+              <a:rPr lang="en-US" sz="1200">
                 <a:solidFill>
                   <a:srgbClr val="000000"/>
                 </a:solidFill>
@@ -8101,7 +8058,7 @@
 </a:t>
             </a:r>
             <a:r>
-              <a:rPr lang="en-US" sz="1200" i="1" dirty="0">
+              <a:rPr lang="en-US" sz="1200" i="1">
                 <a:latin typeface="Arial"/>
                 <a:ea typeface="Arial" pitchFamily="34" charset="-122"/>
                 <a:cs typeface="Arial"/>
@@ -8109,7 +8066,7 @@
               <a:t>Fresh </a:t>
             </a:r>
             <a:r>
-              <a:rPr lang="en-US" sz="1200" i="1" dirty="0" err="1">
+              <a:rPr lang="en-US" sz="1200" i="1" err="1">
                 <a:latin typeface="Arial"/>
                 <a:ea typeface="Arial" pitchFamily="34" charset="-122"/>
                 <a:cs typeface="Arial"/>
@@ -8117,14 +8074,14 @@
               <a:t>tyres</a:t>
             </a:r>
             <a:r>
-              <a:rPr lang="en-US" sz="1200" i="1" dirty="0">
+              <a:rPr lang="en-US" sz="1200" i="1">
                 <a:latin typeface="Arial"/>
                 <a:ea typeface="Arial" pitchFamily="34" charset="-122"/>
                 <a:cs typeface="Arial"/>
               </a:rPr>
               <a:t> only repay the pit lane time once the old set has worn enough.</a:t>
             </a:r>
-            <a:endParaRPr lang="en-US" sz="1200" dirty="0">
+            <a:endParaRPr lang="en-US" sz="1200">
               <a:latin typeface="Arial"/>
               <a:cs typeface="Arial"/>
             </a:endParaRPr>
@@ -9838,8 +9795,8 @@
         </p:nvSpPr>
         <p:spPr>
           <a:xfrm>
-            <a:off x="488769" y="3407229"/>
-            <a:ext cx="8155575" cy="2209799"/>
+            <a:off x="869768" y="3543300"/>
+            <a:ext cx="7039790" cy="2209799"/>
           </a:xfrm>
           <a:prstGeom prst="rect">
             <a:avLst/>
@@ -9858,6 +9815,9 @@
                     <a:lumMod val="76000"/>
                   </a:schemeClr>
                 </a:solidFill>
+                <a:latin typeface="Arial"/>
+                <a:ea typeface="Calibri"/>
+                <a:cs typeface="Arial"/>
               </a:rPr>
               <a:t>Grid position dominates prediction:</a:t>
             </a:r>
@@ -9866,14 +9826,30 @@
                 <a:solidFill>
                   <a:srgbClr val="000000"/>
                 </a:solidFill>
+                <a:latin typeface="Arial"/>
+                <a:ea typeface="Calibri"/>
+                <a:cs typeface="Arial"/>
               </a:rPr>
               <a:t> </a:t>
             </a:r>
+            <a:endParaRPr lang="en-US" sz="1200" dirty="0">
+              <a:solidFill>
+                <a:srgbClr val="000000"/>
+              </a:solidFill>
+              <a:latin typeface="Arial"/>
+              <a:ea typeface="Calibri"/>
+              <a:cs typeface="Arial"/>
+            </a:endParaRPr>
+          </a:p>
+          <a:p>
             <a:r>
               <a:rPr lang="en-US" sz="1200">
                 <a:solidFill>
                   <a:srgbClr val="3C4043"/>
                 </a:solidFill>
+                <a:latin typeface="Arial"/>
+                <a:ea typeface="Calibri"/>
+                <a:cs typeface="Arial"/>
               </a:rPr>
               <a:t>Starting</a:t>
             </a:r>
@@ -9882,14 +9858,16 @@
                 <a:solidFill>
                   <a:srgbClr val="3C4043"/>
                 </a:solidFill>
+                <a:latin typeface="Arial"/>
                 <a:ea typeface="+mn-lt"/>
-                <a:cs typeface="+mn-lt"/>
+                <a:cs typeface="Arial"/>
               </a:rPr>
               <a:t> position is the strongest predictor, followed by car tier and first pit timing.</a:t>
             </a:r>
             <a:endParaRPr lang="en-US" sz="1200">
+              <a:latin typeface="Arial"/>
               <a:ea typeface="Calibri"/>
-              <a:cs typeface="Calibri"/>
+              <a:cs typeface="Arial"/>
             </a:endParaRPr>
           </a:p>
           <a:p>
@@ -9897,6 +9875,9 @@
               <a:solidFill>
                 <a:srgbClr val="3C4043"/>
               </a:solidFill>
+              <a:latin typeface="Arial"/>
+              <a:ea typeface="Calibri"/>
+              <a:cs typeface="Arial"/>
             </a:endParaRPr>
           </a:p>
           <a:p>
@@ -9907,6 +9888,9 @@
                     <a:lumMod val="76000"/>
                   </a:schemeClr>
                 </a:solidFill>
+                <a:latin typeface="Arial"/>
+                <a:ea typeface="Calibri"/>
+                <a:cs typeface="Arial"/>
               </a:rPr>
               <a:t>Strategy adds modest predictive value:</a:t>
             </a:r>
@@ -9917,18 +9901,32 @@
                     <a:lumMod val="76000"/>
                   </a:schemeClr>
                 </a:solidFill>
+                <a:latin typeface="Arial"/>
                 <a:ea typeface="+mn-lt"/>
-                <a:cs typeface="+mn-lt"/>
+                <a:cs typeface="Arial"/>
               </a:rPr>
               <a:t> </a:t>
             </a:r>
+            <a:endParaRPr lang="en-US" sz="1200" dirty="0">
+              <a:solidFill>
+                <a:schemeClr val="accent6">
+                  <a:lumMod val="76000"/>
+                </a:schemeClr>
+              </a:solidFill>
+              <a:latin typeface="Arial"/>
+              <a:ea typeface="+mn-lt"/>
+              <a:cs typeface="Arial"/>
+            </a:endParaRPr>
+          </a:p>
+          <a:p>
             <a:r>
               <a:rPr lang="en-US" sz="1200">
                 <a:solidFill>
                   <a:srgbClr val="3C4043"/>
                 </a:solidFill>
+                <a:latin typeface="Arial"/>
                 <a:ea typeface="+mn-lt"/>
-                <a:cs typeface="+mn-lt"/>
+                <a:cs typeface="Arial"/>
               </a:rPr>
               <a:t>The full model improves RMSE from </a:t>
             </a:r>
@@ -9937,8 +9935,9 @@
                 <a:solidFill>
                   <a:srgbClr val="3C4043"/>
                 </a:solidFill>
+                <a:latin typeface="Arial"/>
                 <a:ea typeface="+mn-lt"/>
-                <a:cs typeface="+mn-lt"/>
+                <a:cs typeface="Arial"/>
               </a:rPr>
               <a:t>3.35</a:t>
             </a:r>
@@ -9947,8 +9946,9 @@
                 <a:solidFill>
                   <a:srgbClr val="3C4043"/>
                 </a:solidFill>
+                <a:latin typeface="Arial"/>
                 <a:ea typeface="+mn-lt"/>
-                <a:cs typeface="+mn-lt"/>
+                <a:cs typeface="Arial"/>
               </a:rPr>
               <a:t> (grid-only baseline) to </a:t>
             </a:r>
@@ -9957,8 +9957,9 @@
                 <a:solidFill>
                   <a:srgbClr val="3C4043"/>
                 </a:solidFill>
+                <a:latin typeface="Arial"/>
                 <a:ea typeface="+mn-lt"/>
-                <a:cs typeface="+mn-lt"/>
+                <a:cs typeface="Arial"/>
               </a:rPr>
               <a:t>3.05</a:t>
             </a:r>
@@ -9967,8 +9968,9 @@
                 <a:solidFill>
                   <a:srgbClr val="3C4043"/>
                 </a:solidFill>
+                <a:latin typeface="Arial"/>
                 <a:ea typeface="+mn-lt"/>
-                <a:cs typeface="+mn-lt"/>
+                <a:cs typeface="Arial"/>
               </a:rPr>
               <a:t>, but </a:t>
             </a:r>
@@ -9977,8 +9979,9 @@
                 <a:solidFill>
                   <a:srgbClr val="3C4043"/>
                 </a:solidFill>
+                <a:latin typeface="Arial"/>
                 <a:ea typeface="+mn-lt"/>
-                <a:cs typeface="+mn-lt"/>
+                <a:cs typeface="Arial"/>
               </a:rPr>
               <a:t>R² remains around 0.10</a:t>
             </a:r>
@@ -9987,14 +9990,16 @@
                 <a:solidFill>
                   <a:srgbClr val="3C4043"/>
                 </a:solidFill>
+                <a:latin typeface="Arial"/>
                 <a:ea typeface="+mn-lt"/>
-                <a:cs typeface="+mn-lt"/>
+                <a:cs typeface="Arial"/>
               </a:rPr>
               <a:t>, indicating that only a small fraction of the variation is predictable.</a:t>
             </a:r>
             <a:endParaRPr lang="en-US" sz="1200">
+              <a:latin typeface="Arial"/>
               <a:ea typeface="+mn-lt"/>
-              <a:cs typeface="+mn-lt"/>
+              <a:cs typeface="Arial"/>
             </a:endParaRPr>
           </a:p>
           <a:p>
@@ -10025,9 +10030,10 @@
               <a:t>
 </a:t>
             </a:r>
-            <a:endParaRPr lang="en-US" sz="1200" dirty="0">
+            <a:endParaRPr lang="en-US" sz="1200">
+              <a:latin typeface="Arial"/>
               <a:ea typeface="Calibri"/>
-              <a:cs typeface="Calibri"/>
+              <a:cs typeface="Arial"/>
             </a:endParaRPr>
           </a:p>
         </p:txBody>
@@ -10065,12 +10071,17 @@
           <a:p>
             <a:r>
               <a:rPr lang="en-US" sz="1200">
+                <a:latin typeface="Calibri"/>
                 <a:ea typeface="+mn-lt"/>
-                <a:cs typeface="+mn-lt"/>
+                <a:cs typeface="Calibri"/>
               </a:rPr>
               <a:t>Random Forest Feature Importance</a:t>
             </a:r>
-            <a:endParaRPr lang="en-US" sz="1200"/>
+            <a:endParaRPr lang="en-US" sz="1200">
+              <a:latin typeface="Calibri"/>
+              <a:ea typeface="Calibri"/>
+              <a:cs typeface="Calibri"/>
+            </a:endParaRPr>
           </a:p>
         </p:txBody>
       </p:sp>
@@ -10107,12 +10118,17 @@
           <a:p>
             <a:r>
               <a:rPr lang="en-US" sz="1200">
+                <a:latin typeface="Calibri"/>
                 <a:ea typeface="+mn-lt"/>
-                <a:cs typeface="+mn-lt"/>
+                <a:cs typeface="Calibri"/>
               </a:rPr>
               <a:t>Predicted vs Actual (RF, 2025)</a:t>
             </a:r>
-            <a:endParaRPr lang="en-US" sz="1200"/>
+            <a:endParaRPr lang="en-US" sz="1200">
+              <a:latin typeface="Calibri"/>
+              <a:ea typeface="Calibri"/>
+              <a:cs typeface="Calibri"/>
+            </a:endParaRPr>
           </a:p>
         </p:txBody>
       </p:sp>
@@ -10478,7 +10494,7 @@
             </a:endParaRPr>
           </a:p>
           <a:p>
-            <a:endParaRPr lang="en-US" sz="1400" b="1" dirty="0">
+            <a:endParaRPr lang="en-US" sz="1400" b="1">
               <a:solidFill>
                 <a:schemeClr val="accent6">
                   <a:lumMod val="76000"/>
@@ -10517,7 +10533,7 @@
             </a:endParaRPr>
           </a:p>
           <a:p>
-            <a:endParaRPr lang="en-US" sz="1400" dirty="0">
+            <a:endParaRPr lang="en-US" sz="1400">
               <a:latin typeface="Arial"/>
               <a:ea typeface="Calibri"/>
               <a:cs typeface="Arial"/>
@@ -10548,7 +10564,7 @@
             </a:endParaRPr>
           </a:p>
           <a:p>
-            <a:endParaRPr lang="en-US" sz="1400" b="1" dirty="0">
+            <a:endParaRPr lang="en-US" sz="1400" b="1">
               <a:solidFill>
                 <a:schemeClr val="accent6">
                   <a:lumMod val="76000"/>
@@ -10561,7 +10577,7 @@
           </a:p>
           <a:p>
             <a:r>
-              <a:rPr lang="en-US" sz="1400" dirty="0">
+              <a:rPr lang="en-US" sz="1400">
                 <a:latin typeface="Arial"/>
                 <a:ea typeface="+mn-lt"/>
                 <a:cs typeface="Arial"/>
@@ -10569,7 +10585,7 @@
               <a:t>Feature ablation shows that adding more engineered features provides only small improvements, with RMSE </a:t>
             </a:r>
             <a:r>
-              <a:rPr lang="en-US" sz="1400" dirty="0" err="1">
+              <a:rPr lang="en-US" sz="1400" err="1">
                 <a:latin typeface="Arial"/>
                 <a:ea typeface="+mn-lt"/>
                 <a:cs typeface="Arial"/>
@@ -10577,7 +10593,7 @@
               <a:t>stabilising</a:t>
             </a:r>
             <a:r>
-              <a:rPr lang="en-US" sz="1400" dirty="0">
+              <a:rPr lang="en-US" sz="1400">
                 <a:latin typeface="Arial"/>
                 <a:ea typeface="+mn-lt"/>
                 <a:cs typeface="Arial"/>
@@ -10585,7 +10601,7 @@
               <a:t> around </a:t>
             </a:r>
             <a:r>
-              <a:rPr lang="en-US" sz="1400" b="1" dirty="0">
+              <a:rPr lang="en-US" sz="1400" b="1">
                 <a:latin typeface="Arial"/>
                 <a:ea typeface="+mn-lt"/>
                 <a:cs typeface="Arial"/>
@@ -10593,21 +10609,21 @@
               <a:t>3.0</a:t>
             </a:r>
             <a:r>
-              <a:rPr lang="en-US" sz="1400" dirty="0">
+              <a:rPr lang="en-US" sz="1400">
                 <a:latin typeface="Arial"/>
                 <a:ea typeface="+mn-lt"/>
                 <a:cs typeface="Arial"/>
               </a:rPr>
               <a:t>.</a:t>
             </a:r>
-            <a:endParaRPr lang="en-US" sz="1400" dirty="0">
+            <a:endParaRPr lang="en-US" sz="1400">
               <a:latin typeface="Arial"/>
               <a:ea typeface="Calibri"/>
               <a:cs typeface="Arial"/>
             </a:endParaRPr>
           </a:p>
           <a:p>
-            <a:endParaRPr lang="en-US" sz="1400" dirty="0">
+            <a:endParaRPr lang="en-US" sz="1400">
               <a:latin typeface="Arial"/>
               <a:ea typeface="Calibri"/>
               <a:cs typeface="Arial"/>
@@ -10638,7 +10654,7 @@
             </a:endParaRPr>
           </a:p>
           <a:p>
-            <a:endParaRPr lang="en-US" sz="1400" b="1" dirty="0">
+            <a:endParaRPr lang="en-US" sz="1400" b="1">
               <a:solidFill>
                 <a:schemeClr val="accent6">
                   <a:lumMod val="76000"/>
@@ -10690,14 +10706,14 @@
               </a:rPr>
               <a:t>.</a:t>
             </a:r>
-            <a:endParaRPr lang="en-US" sz="1400" dirty="0">
+            <a:endParaRPr lang="en-US" sz="1400">
               <a:latin typeface="Arial"/>
               <a:ea typeface="Calibri"/>
               <a:cs typeface="Arial"/>
             </a:endParaRPr>
           </a:p>
           <a:p>
-            <a:endParaRPr lang="en-US" sz="1400" dirty="0">
+            <a:endParaRPr lang="en-US" sz="1400">
               <a:ea typeface="Calibri"/>
               <a:cs typeface="Calibri"/>
             </a:endParaRPr>
@@ -10982,7 +10998,7 @@
             </a:endParaRPr>
           </a:p>
           <a:p>
-            <a:endParaRPr lang="en-US" sz="1200" b="1" dirty="0">
+            <a:endParaRPr lang="en-US" sz="1200" b="1">
               <a:solidFill>
                 <a:srgbClr val="000000"/>
               </a:solidFill>
@@ -11034,7 +11050,7 @@
             </a:r>
           </a:p>
           <a:p>
-            <a:endParaRPr lang="en-US" sz="1200" dirty="0">
+            <a:endParaRPr lang="en-US" sz="1200">
               <a:solidFill>
                 <a:srgbClr val="3C4043"/>
               </a:solidFill>
@@ -11071,7 +11087,7 @@
             </a:endParaRPr>
           </a:p>
           <a:p>
-            <a:endParaRPr lang="en-US" sz="1200" b="1" dirty="0">
+            <a:endParaRPr lang="en-US" sz="1200" b="1">
               <a:solidFill>
                 <a:srgbClr val="000000"/>
               </a:solidFill>
@@ -11094,7 +11110,7 @@
             <a:pPr marL="0" indent="0">
               <a:buNone/>
             </a:pPr>
-            <a:endParaRPr lang="en-US" sz="1200" dirty="0">
+            <a:endParaRPr lang="en-US" sz="1200">
               <a:solidFill>
                 <a:srgbClr val="3C4043"/>
               </a:solidFill>
@@ -11590,22 +11606,17 @@
               </a:rPr>
               <a:t> an early pit stop works.</a:t>
             </a:r>
-            <a:endParaRPr lang="en-US" sz="1400" dirty="0">
-              <a:latin typeface="Arial"/>
-              <a:ea typeface="+mn-lt"/>
-              <a:cs typeface="Arial"/>
-            </a:endParaRPr>
           </a:p>
           <a:p>
             <a:br>
-              <a:rPr lang="en-US" sz="1400" dirty="0">
+              <a:rPr lang="en-US" sz="1400">
                 <a:latin typeface="Arial"/>
                 <a:ea typeface="+mn-lt"/>
                 <a:cs typeface="Arial"/>
               </a:rPr>
             </a:br>
             <a:r>
-              <a:rPr lang="en-US" sz="1400" dirty="0">
+              <a:rPr lang="en-US" sz="1400">
                 <a:latin typeface="Arial"/>
                 <a:ea typeface="+mn-lt"/>
                 <a:cs typeface="Arial"/>
@@ -11613,30 +11624,12 @@
               <a:t>This block asks: </a:t>
             </a:r>
             <a:r>
-              <a:rPr lang="en-US" sz="1400" b="1" dirty="0">
+              <a:rPr lang="en-US" sz="1400" b="1">
                 <a:latin typeface="Arial"/>
                 <a:ea typeface="+mn-lt"/>
                 <a:cs typeface="Arial"/>
               </a:rPr>
               <a:t>what strategy patterns actually exist?</a:t>
-            </a:r>
-            <a:endParaRPr lang="en-US" sz="1400" dirty="0">
-              <a:latin typeface="Arial"/>
-              <a:cs typeface="Arial"/>
-            </a:endParaRPr>
-          </a:p>
-          <a:p>
-            <a:pPr marL="285750" indent="-285750">
-              <a:buFont typeface="Arial"/>
-              <a:buChar char="•"/>
-            </a:pPr>
-            <a:r>
-              <a:rPr lang="en-US" sz="1400">
-                <a:latin typeface="Arial"/>
-                <a:ea typeface="+mn-lt"/>
-                <a:cs typeface="Arial"/>
-              </a:rPr>
-              <a:t>3,324 dry-compound stints across 2022–2025</a:t>
             </a:r>
             <a:endParaRPr lang="en-US" sz="1400">
               <a:latin typeface="Arial"/>
@@ -11654,7 +11647,7 @@
                 <a:ea typeface="+mn-lt"/>
                 <a:cs typeface="Arial"/>
               </a:rPr>
-              <a:t>No labels -drivers and teams make choices, we discover structure</a:t>
+              <a:t>3,324 dry-compound stints across 2022–2025</a:t>
             </a:r>
             <a:endParaRPr lang="en-US" sz="1400">
               <a:latin typeface="Arial"/>
@@ -11672,23 +11665,7 @@
                 <a:ea typeface="+mn-lt"/>
                 <a:cs typeface="Arial"/>
               </a:rPr>
-              <a:t>Goal: </a:t>
-            </a:r>
-            <a:r>
-              <a:rPr lang="en-US" sz="1400" b="1">
-                <a:latin typeface="Arial"/>
-                <a:ea typeface="+mn-lt"/>
-                <a:cs typeface="Arial"/>
-              </a:rPr>
-              <a:t>interpretable archetypes</a:t>
-            </a:r>
-            <a:r>
-              <a:rPr lang="en-US" sz="1400">
-                <a:latin typeface="Arial"/>
-                <a:ea typeface="+mn-lt"/>
-                <a:cs typeface="Arial"/>
-              </a:rPr>
-              <a:t> that connect back to the causal treatment definition</a:t>
+              <a:t>No labels -drivers and teams make choices, we discover structure</a:t>
             </a:r>
             <a:endParaRPr lang="en-US" sz="1400">
               <a:latin typeface="Arial"/>
@@ -11700,7 +11677,41 @@
               <a:buFont typeface="Arial"/>
               <a:buChar char="•"/>
             </a:pPr>
-            <a:endParaRPr lang="en-US" sz="1400" b="1" dirty="0">
+            <a:r>
+              <a:rPr lang="en-US" sz="1400">
+                <a:latin typeface="Arial"/>
+                <a:ea typeface="+mn-lt"/>
+                <a:cs typeface="Arial"/>
+              </a:rPr>
+              <a:t>Goal: </a:t>
+            </a:r>
+            <a:r>
+              <a:rPr lang="en-US" sz="1400" b="1">
+                <a:latin typeface="Arial"/>
+                <a:ea typeface="+mn-lt"/>
+                <a:cs typeface="Arial"/>
+              </a:rPr>
+              <a:t>interpretable archetypes</a:t>
+            </a:r>
+            <a:r>
+              <a:rPr lang="en-US" sz="1400">
+                <a:latin typeface="Arial"/>
+                <a:ea typeface="+mn-lt"/>
+                <a:cs typeface="Arial"/>
+              </a:rPr>
+              <a:t> that connect back to the causal treatment definition</a:t>
+            </a:r>
+            <a:endParaRPr lang="en-US" sz="1400">
+              <a:latin typeface="Arial"/>
+              <a:cs typeface="Arial"/>
+            </a:endParaRPr>
+          </a:p>
+          <a:p>
+            <a:pPr marL="285750" indent="-285750">
+              <a:buFont typeface="Arial"/>
+              <a:buChar char="•"/>
+            </a:pPr>
+            <a:endParaRPr lang="en-US" sz="1400" b="1">
               <a:solidFill>
                 <a:srgbClr val="000000"/>
               </a:solidFill>
@@ -11711,7 +11722,7 @@
           </a:p>
           <a:p>
             <a:r>
-              <a:rPr lang="en-US" sz="1400" b="1" dirty="0">
+              <a:rPr lang="en-US" sz="1400" b="1">
                 <a:solidFill>
                   <a:srgbClr val="000000"/>
                 </a:solidFill>
@@ -11722,7 +11733,7 @@
               <a:t>Key question:</a:t>
             </a:r>
             <a:r>
-              <a:rPr lang="en-US" sz="1400" dirty="0">
+              <a:rPr lang="en-US" sz="1400">
                 <a:solidFill>
                   <a:srgbClr val="000000"/>
                 </a:solidFill>
@@ -11733,7 +11744,7 @@
               <a:t> Does the `</a:t>
             </a:r>
             <a:r>
-              <a:rPr lang="en-US" sz="1400" dirty="0" err="1">
+              <a:rPr lang="en-US" sz="1400" err="1">
                 <a:solidFill>
                   <a:srgbClr val="000000"/>
                 </a:solidFill>
@@ -11744,7 +11755,7 @@
               <a:t>early_pit</a:t>
             </a:r>
             <a:r>
-              <a:rPr lang="en-US" sz="1400" dirty="0">
+              <a:rPr lang="en-US" sz="1400">
                 <a:solidFill>
                   <a:srgbClr val="000000"/>
                 </a:solidFill>
@@ -11754,7 +11765,7 @@
               </a:rPr>
               <a:t> binary` (&lt; 40%) correspond to a real, distinct cluster?</a:t>
             </a:r>
-            <a:endParaRPr lang="en-US" sz="1400" dirty="0">
+            <a:endParaRPr lang="en-US" sz="1400">
               <a:latin typeface="Arial"/>
               <a:ea typeface="Calibri"/>
               <a:cs typeface="Arial"/>
@@ -13449,7 +13460,7 @@
           <a:lstStyle/>
           <a:p>
             <a:r>
-              <a:rPr lang="en-US" sz="1400" b="1" dirty="0">
+              <a:rPr lang="en-US" sz="1400" b="1">
                 <a:solidFill>
                   <a:srgbClr val="4C7A00"/>
                 </a:solidFill>
@@ -13459,6 +13470,16 @@
               </a:rPr>
               <a:t>Causal core:  </a:t>
             </a:r>
+            <a:endParaRPr lang="en-US" sz="1400">
+              <a:solidFill>
+                <a:srgbClr val="000000"/>
+              </a:solidFill>
+              <a:latin typeface="Arial"/>
+              <a:ea typeface="Arial" pitchFamily="34" charset="-122"/>
+              <a:cs typeface="Arial"/>
+            </a:endParaRPr>
+          </a:p>
+          <a:p>
             <a:r>
               <a:rPr lang="en-US" sz="1400" dirty="0">
                 <a:solidFill>
@@ -13485,21 +13506,21 @@
         </p:nvSpPr>
         <p:spPr>
           <a:xfrm>
-            <a:off x="548640" y="3474720"/>
-            <a:ext cx="7772400" cy="914400"/>
-          </a:xfrm>
-          <a:prstGeom prst="rect">
-            <a:avLst/>
-          </a:prstGeom>
-          <a:noFill/>
-          <a:ln/>
-        </p:spPr>
-        <p:txBody>
-          <a:bodyPr wrap="square" lIns="0" tIns="0" rIns="0" bIns="0" rtlCol="0" anchor="ctr"/>
-          <a:lstStyle/>
-          <a:p>
-            <a:r>
-              <a:rPr lang="en-US" sz="1400" b="1" dirty="0">
+            <a:off x="559527" y="3469277"/>
+            <a:ext cx="7489370" cy="914400"/>
+          </a:xfrm>
+          <a:prstGeom prst="rect">
+            <a:avLst/>
+          </a:prstGeom>
+          <a:noFill/>
+          <a:ln/>
+        </p:spPr>
+        <p:txBody>
+          <a:bodyPr wrap="square" lIns="0" tIns="0" rIns="0" bIns="0" rtlCol="0" anchor="ctr"/>
+          <a:lstStyle/>
+          <a:p>
+            <a:r>
+              <a:rPr lang="en-US" sz="1400" b="1">
                 <a:solidFill>
                   <a:srgbClr val="4C7A00"/>
                 </a:solidFill>
@@ -13509,6 +13530,13 @@
               </a:rPr>
               <a:t>The catch: </a:t>
             </a:r>
+            <a:endParaRPr lang="en-US"/>
+          </a:p>
+          <a:p>
+            <a:pPr marL="285750" indent="-285750">
+              <a:buFont typeface="Arial"/>
+              <a:buChar char="•"/>
+            </a:pPr>
             <a:r>
               <a:rPr lang="en-US" sz="1400" dirty="0">
                 <a:solidFill>
@@ -13517,11 +13545,112 @@
                     <a:lumOff val="15000"/>
                   </a:schemeClr>
                 </a:solidFill>
+                <a:latin typeface="Arial"/>
                 <a:ea typeface="+mn-lt"/>
-                <a:cs typeface="+mn-lt"/>
-              </a:rPr>
-              <a:t>Faster cars tend to pit at different times and also finish higher up the order. A simple comparison would therefore mix the effect of pit strategy with the effect of car performance. The goal is to separate the impact of the strategy from the impact of the car.</a:t>
-            </a:r>
+                <a:cs typeface="Arial"/>
+              </a:rPr>
+              <a:t>Faster cars tend to pit at different times and also finish higher up the order.</a:t>
+            </a:r>
+            <a:endParaRPr lang="en-US" dirty="0">
+              <a:solidFill>
+                <a:schemeClr val="tx1">
+                  <a:lumMod val="85000"/>
+                  <a:lumOff val="15000"/>
+                </a:schemeClr>
+              </a:solidFill>
+              <a:latin typeface="Calibri" panose="020F0502020204030204"/>
+              <a:ea typeface="+mn-lt"/>
+              <a:cs typeface="Calibri" panose="020F0502020204030204"/>
+            </a:endParaRPr>
+          </a:p>
+          <a:p>
+            <a:pPr marL="285750" indent="-285750">
+              <a:buFont typeface="Arial"/>
+              <a:buChar char="•"/>
+            </a:pPr>
+            <a:r>
+              <a:rPr lang="en-US" sz="1400">
+                <a:solidFill>
+                  <a:schemeClr val="tx1">
+                    <a:lumMod val="85000"/>
+                    <a:lumOff val="15000"/>
+                  </a:schemeClr>
+                </a:solidFill>
+                <a:latin typeface="Arial"/>
+                <a:ea typeface="+mn-lt"/>
+                <a:cs typeface="Arial"/>
+              </a:rPr>
+              <a:t>A simple comparison </a:t>
+            </a:r>
+            <a:r>
+              <a:rPr lang="en-US" sz="1400" dirty="0">
+                <a:solidFill>
+                  <a:schemeClr val="tx1">
+                    <a:lumMod val="85000"/>
+                    <a:lumOff val="15000"/>
+                  </a:schemeClr>
+                </a:solidFill>
+                <a:latin typeface="Arial"/>
+                <a:ea typeface="+mn-lt"/>
+                <a:cs typeface="Arial"/>
+              </a:rPr>
+              <a:t>would therefore mix the effect of pit strategy with the effect of car </a:t>
+            </a:r>
+            <a:r>
+              <a:rPr lang="en-US" sz="1400">
+                <a:solidFill>
+                  <a:schemeClr val="tx1">
+                    <a:lumMod val="85000"/>
+                    <a:lumOff val="15000"/>
+                  </a:schemeClr>
+                </a:solidFill>
+                <a:latin typeface="Arial"/>
+                <a:ea typeface="+mn-lt"/>
+                <a:cs typeface="Arial"/>
+              </a:rPr>
+              <a:t>performance. </a:t>
+            </a:r>
+            <a:endParaRPr lang="en-US">
+              <a:solidFill>
+                <a:schemeClr val="tx1">
+                  <a:lumMod val="85000"/>
+                  <a:lumOff val="15000"/>
+                </a:schemeClr>
+              </a:solidFill>
+              <a:latin typeface="Calibri" panose="020F0502020204030204"/>
+              <a:ea typeface="+mn-lt"/>
+              <a:cs typeface="Calibri"/>
+            </a:endParaRPr>
+          </a:p>
+          <a:p>
+            <a:pPr marL="285750" indent="-285750">
+              <a:buFont typeface="Arial"/>
+              <a:buChar char="•"/>
+            </a:pPr>
+            <a:r>
+              <a:rPr lang="en-US" sz="1400">
+                <a:solidFill>
+                  <a:schemeClr val="tx1">
+                    <a:lumMod val="85000"/>
+                    <a:lumOff val="15000"/>
+                  </a:schemeClr>
+                </a:solidFill>
+                <a:latin typeface="Arial"/>
+                <a:ea typeface="+mn-lt"/>
+                <a:cs typeface="Arial"/>
+              </a:rPr>
+              <a:t>The goal is to separate the impact of the strategy from the impact of the car.</a:t>
+            </a:r>
+            <a:endParaRPr lang="en-US">
+              <a:solidFill>
+                <a:schemeClr val="tx1">
+                  <a:lumMod val="85000"/>
+                  <a:lumOff val="15000"/>
+                </a:schemeClr>
+              </a:solidFill>
+              <a:ea typeface="Calibri"/>
+              <a:cs typeface="Calibri"/>
+            </a:endParaRPr>
           </a:p>
         </p:txBody>
       </p:sp>
@@ -13994,17 +14123,20 @@
               <a:buNone/>
             </a:pPr>
             <a:r>
-              <a:rPr lang="en-US" sz="1450">
+              <a:rPr lang="en-US" sz="1400">
                 <a:solidFill>
                   <a:srgbClr val="3C4043"/>
                 </a:solidFill>
-                <a:latin typeface="Arial" pitchFamily="34" charset="0"/>
-                <a:ea typeface="Arial" pitchFamily="34" charset="-122"/>
-                <a:cs typeface="Arial" pitchFamily="34" charset="-120"/>
+                <a:latin typeface="Arial"/>
+                <a:ea typeface="Arial" pitchFamily="34" charset="-122"/>
+                <a:cs typeface="Arial"/>
               </a:rPr>
               <a:t>Strategy matters, but only a little. Grid slot and car quality dominate.</a:t>
             </a:r>
-            <a:endParaRPr lang="en-US" sz="1450"/>
+            <a:endParaRPr lang="en-US" sz="1400">
+              <a:latin typeface="Arial"/>
+              <a:cs typeface="Arial"/>
+            </a:endParaRPr>
           </a:p>
         </p:txBody>
       </p:sp>
@@ -14092,17 +14224,20 @@
               <a:buNone/>
             </a:pPr>
             <a:r>
-              <a:rPr lang="en-US" sz="1450">
+              <a:rPr lang="en-US" sz="1400">
                 <a:solidFill>
                   <a:srgbClr val="3C4043"/>
                 </a:solidFill>
-                <a:latin typeface="Arial" pitchFamily="34" charset="0"/>
-                <a:ea typeface="Arial" pitchFamily="34" charset="-122"/>
-                <a:cs typeface="Arial" pitchFamily="34" charset="-120"/>
+                <a:latin typeface="Arial"/>
+                <a:ea typeface="Arial" pitchFamily="34" charset="-122"/>
+                <a:cs typeface="Arial"/>
               </a:rPr>
               <a:t>Pitting early does not pay. It costs about 0.7 to 1.0 positions, and three methods agree.</a:t>
             </a:r>
-            <a:endParaRPr lang="en-US" sz="1450"/>
+            <a:endParaRPr lang="en-US" sz="1400">
+              <a:latin typeface="Arial"/>
+              <a:cs typeface="Arial"/>
+            </a:endParaRPr>
           </a:p>
         </p:txBody>
       </p:sp>
@@ -14190,17 +14325,21 @@
               <a:buNone/>
             </a:pPr>
             <a:r>
-              <a:rPr lang="en-US" sz="1450">
+              <a:rPr lang="en-US" sz="1400">
                 <a:solidFill>
                   <a:srgbClr val="3C4043"/>
                 </a:solidFill>
-                <a:latin typeface="Arial" pitchFamily="34" charset="0"/>
-                <a:ea typeface="Arial" pitchFamily="34" charset="-122"/>
-                <a:cs typeface="Arial" pitchFamily="34" charset="-120"/>
+                <a:latin typeface="Arial"/>
+                <a:ea typeface="Arial" pitchFamily="34" charset="-122"/>
+                <a:cs typeface="Arial"/>
               </a:rPr>
               <a:t>The best first stop is mid race, around 30 to 50%. Going earlier than 30% wastes value.</a:t>
             </a:r>
-            <a:endParaRPr lang="en-US" sz="1450"/>
+            <a:endParaRPr lang="en-US" sz="1400">
+              <a:latin typeface="Arial"/>
+              <a:ea typeface="Calibri"/>
+              <a:cs typeface="Arial"/>
+            </a:endParaRPr>
           </a:p>
         </p:txBody>
       </p:sp>
@@ -14288,17 +14427,21 @@
               <a:buNone/>
             </a:pPr>
             <a:r>
-              <a:rPr lang="en-US" sz="1450">
+              <a:rPr lang="en-US" sz="1400">
                 <a:solidFill>
                   <a:srgbClr val="3C4043"/>
                 </a:solidFill>
-                <a:latin typeface="Arial" pitchFamily="34" charset="0"/>
-                <a:ea typeface="Arial" pitchFamily="34" charset="-122"/>
-                <a:cs typeface="Arial" pitchFamily="34" charset="-120"/>
+                <a:latin typeface="Arial"/>
+                <a:ea typeface="Arial" pitchFamily="34" charset="-122"/>
+                <a:cs typeface="Arial"/>
               </a:rPr>
               <a:t>Strategies form a smooth spectrum, not a handful of types.</a:t>
             </a:r>
-            <a:endParaRPr lang="en-US" sz="1450"/>
+            <a:endParaRPr lang="en-US" sz="1400">
+              <a:latin typeface="Arial"/>
+              <a:ea typeface="Calibri"/>
+              <a:cs typeface="Arial"/>
+            </a:endParaRPr>
           </a:p>
         </p:txBody>
       </p:sp>
@@ -14386,7 +14529,7 @@
               <a:buNone/>
             </a:pPr>
             <a:r>
-              <a:rPr lang="en-US" sz="1450">
+              <a:rPr lang="en-US" sz="1400">
                 <a:solidFill>
                   <a:srgbClr val="3C4043"/>
                 </a:solidFill>
@@ -14396,7 +14539,7 @@
               </a:rPr>
               <a:t>Who scores is easier to predict; how many places you gain is mostly noise.</a:t>
             </a:r>
-            <a:endParaRPr lang="en-US" sz="1450">
+            <a:endParaRPr lang="en-US" sz="1400">
               <a:latin typeface="Arial"/>
               <a:cs typeface="Arial"/>
             </a:endParaRPr>
@@ -14659,7 +14802,7 @@
               <a:buChar char="•"/>
             </a:pPr>
             <a:r>
-              <a:rPr lang="en-US" sz="1400" dirty="0">
+              <a:rPr lang="en-US" sz="1400">
                 <a:solidFill>
                   <a:srgbClr val="3C4043"/>
                 </a:solidFill>
@@ -14684,7 +14827,7 @@
               <a:buChar char="•"/>
             </a:pPr>
             <a:r>
-              <a:rPr lang="en-US" sz="1400" dirty="0">
+              <a:rPr lang="en-US" sz="1400">
                 <a:solidFill>
                   <a:srgbClr val="3C4043"/>
                 </a:solidFill>
@@ -14695,7 +14838,7 @@
               <a:t>Early stops cost places, the payoff sits in the middle of the race, and once </a:t>
             </a:r>
             <a:r>
-              <a:rPr lang="en-US" sz="1400" dirty="0" err="1">
+              <a:rPr lang="en-US" sz="1400" err="1">
                 <a:solidFill>
                   <a:srgbClr val="3C4043"/>
                 </a:solidFill>
@@ -14706,7 +14849,7 @@
               <a:t>you</a:t>
             </a:r>
             <a:r>
-              <a:rPr lang="en-US" sz="1400" dirty="0">
+              <a:rPr lang="en-US" sz="1400">
                 <a:solidFill>
                   <a:srgbClr val="3C4043"/>
                 </a:solidFill>
@@ -14739,18 +14882,7 @@
                 <a:ea typeface="Arial" pitchFamily="34" charset="-122"/>
                 <a:cs typeface="Arial"/>
               </a:rPr>
-              <a:t>What makes the finding credible is that </a:t>
-            </a:r>
-            <a:r>
-              <a:rPr lang="en-US" sz="1400" dirty="0">
-                <a:solidFill>
-                  <a:srgbClr val="3C4043"/>
-                </a:solidFill>
-                <a:latin typeface="Arial"/>
-                <a:ea typeface="Arial" pitchFamily="34" charset="-122"/>
-                <a:cs typeface="Arial"/>
-              </a:rPr>
-              <a:t>three separate methods all point the same way.</a:t>
+              <a:t>What makes the finding credible is that three separate methods all point the same way.</a:t>
             </a:r>
             <a:endParaRPr lang="en-US" sz="1400">
               <a:latin typeface="Arial"/>
@@ -15281,7 +15413,7 @@
               <a:buNone/>
             </a:pPr>
             <a:r>
-              <a:rPr lang="en-US" sz="1400" b="1" dirty="0">
+              <a:rPr lang="en-US" sz="1400" b="1">
                 <a:solidFill>
                   <a:srgbClr val="4C7A00"/>
                 </a:solidFill>
@@ -15292,7 +15424,7 @@
               <a:t>Dynamic car quality.  </a:t>
             </a:r>
             <a:r>
-              <a:rPr lang="en-US" sz="1400" dirty="0">
+              <a:rPr lang="en-US" sz="1400">
                 <a:solidFill>
                   <a:srgbClr val="3C4043"/>
                 </a:solidFill>
@@ -15303,7 +15435,7 @@
               <a:t>Replace the static yearly tier with rolling, race by race form, so </a:t>
             </a:r>
             <a:r>
-              <a:rPr lang="en-US" sz="1400" dirty="0" err="1">
+              <a:rPr lang="en-US" sz="1400" err="1">
                 <a:solidFill>
                   <a:srgbClr val="3C4043"/>
                 </a:solidFill>
@@ -15314,7 +15446,7 @@
               <a:t>mid season</a:t>
             </a:r>
             <a:r>
-              <a:rPr lang="en-US" sz="1400" dirty="0">
+              <a:rPr lang="en-US" sz="1400">
                 <a:solidFill>
                   <a:srgbClr val="3C4043"/>
                 </a:solidFill>
@@ -15357,7 +15489,7 @@
               <a:buNone/>
             </a:pPr>
             <a:r>
-              <a:rPr lang="en-US" sz="1400" b="1" dirty="0">
+              <a:rPr lang="en-US" sz="1400" b="1">
                 <a:solidFill>
                   <a:srgbClr val="4C7A00"/>
                 </a:solidFill>
@@ -15368,7 +15500,7 @@
               <a:t>Heterogeneous effects.  </a:t>
             </a:r>
             <a:r>
-              <a:rPr lang="en-US" sz="1400" dirty="0">
+              <a:rPr lang="en-US" sz="1400">
                 <a:solidFill>
                   <a:srgbClr val="3C4043"/>
                 </a:solidFill>
@@ -15411,7 +15543,7 @@
               <a:buNone/>
             </a:pPr>
             <a:r>
-              <a:rPr lang="en-US" sz="1400" b="1" dirty="0">
+              <a:rPr lang="en-US" sz="1400" b="1">
                 <a:solidFill>
                   <a:srgbClr val="4C7A00"/>
                 </a:solidFill>
@@ -15422,7 +15554,7 @@
               <a:t>Broader conditions.  </a:t>
             </a:r>
             <a:r>
-              <a:rPr lang="en-US" sz="1400" dirty="0">
+              <a:rPr lang="en-US" sz="1400">
                 <a:solidFill>
                   <a:srgbClr val="3C4043"/>
                 </a:solidFill>
@@ -15433,7 +15565,7 @@
               <a:t>Bring wet races back </a:t>
             </a:r>
             <a:r>
-              <a:rPr lang="en-US" sz="1400" dirty="0" err="1">
+              <a:rPr lang="en-US" sz="1400" err="1">
                 <a:solidFill>
                   <a:srgbClr val="3C4043"/>
                 </a:solidFill>
@@ -15444,7 +15576,7 @@
               <a:t>in, and</a:t>
             </a:r>
             <a:r>
-              <a:rPr lang="en-US" sz="1400" dirty="0">
+              <a:rPr lang="en-US" sz="1400">
                 <a:solidFill>
                   <a:srgbClr val="3C4043"/>
                 </a:solidFill>
@@ -15455,7 +15587,7 @@
               <a:t> add </a:t>
             </a:r>
             <a:r>
-              <a:rPr lang="en-US" sz="1400" dirty="0" err="1">
+              <a:rPr lang="en-US" sz="1400" err="1">
                 <a:solidFill>
                   <a:srgbClr val="3C4043"/>
                 </a:solidFill>
@@ -15466,7 +15598,7 @@
               <a:t>tyre</a:t>
             </a:r>
             <a:r>
-              <a:rPr lang="en-US" sz="1400" dirty="0">
+              <a:rPr lang="en-US" sz="1400">
                 <a:solidFill>
                   <a:srgbClr val="3C4043"/>
                 </a:solidFill>
@@ -15905,7 +16037,7 @@
               <a:t>Interference:  </a:t>
             </a:r>
             <a:r>
-              <a:rPr lang="en-US" sz="1350" dirty="0">
+              <a:rPr lang="en-US" sz="1350">
                 <a:solidFill>
                   <a:srgbClr val="3C4043"/>
                 </a:solidFill>
@@ -15915,7 +16047,7 @@
               </a:rPr>
               <a:t>Positions are roughly zero sum, so one driver's stop changes everyone else's race. We report the individual effect and cluster errors by race.</a:t>
             </a:r>
-            <a:endParaRPr lang="en-US" sz="1350" dirty="0">
+            <a:endParaRPr lang="en-US" sz="1350">
               <a:latin typeface="Arial"/>
               <a:cs typeface="Arial"/>
             </a:endParaRPr>
@@ -15955,7 +16087,7 @@
               <a:t>Selection within a race:  </a:t>
             </a:r>
             <a:r>
-              <a:rPr lang="en-US" sz="1350" dirty="0">
+              <a:rPr lang="en-US" sz="1350">
                 <a:solidFill>
                   <a:srgbClr val="3C4043"/>
                 </a:solidFill>
@@ -15965,7 +16097,7 @@
               </a:rPr>
               <a:t>Fixed effects cannot remove a first lap incident that forces an early stop.</a:t>
             </a:r>
-            <a:endParaRPr lang="en-US" sz="1350" dirty="0">
+            <a:endParaRPr lang="en-US" sz="1350">
               <a:latin typeface="Arial"/>
               <a:cs typeface="Arial"/>
             </a:endParaRPr>
@@ -16005,7 +16137,7 @@
               <a:t>No safety car data:  </a:t>
             </a:r>
             <a:r>
-              <a:rPr lang="en-US" sz="1350" dirty="0">
+              <a:rPr lang="en-US" sz="1350">
                 <a:solidFill>
                   <a:srgbClr val="3C4043"/>
                 </a:solidFill>
@@ -16015,7 +16147,7 @@
               </a:rPr>
               <a:t>Those columns were corrupt, so we adjust for confounders rather than use them as an instrument.</a:t>
             </a:r>
-            <a:endParaRPr lang="en-US" sz="1350" dirty="0">
+            <a:endParaRPr lang="en-US" sz="1350">
               <a:latin typeface="Arial"/>
               <a:cs typeface="Arial"/>
             </a:endParaRPr>
@@ -16055,7 +16187,7 @@
               <a:t>Missing 2022 weather:  </a:t>
             </a:r>
             <a:r>
-              <a:rPr lang="en-US" sz="1350" dirty="0">
+              <a:rPr lang="en-US" sz="1350">
                 <a:solidFill>
                   <a:srgbClr val="3C4043"/>
                 </a:solidFill>
@@ -16065,7 +16197,7 @@
               </a:rPr>
               <a:t>The causal block runs on 2023 and 2024 only.</a:t>
             </a:r>
-            <a:endParaRPr lang="en-US" sz="1350" dirty="0">
+            <a:endParaRPr lang="en-US" sz="1350">
               <a:latin typeface="Arial"/>
               <a:cs typeface="Arial"/>
             </a:endParaRPr>
@@ -16105,7 +16237,7 @@
               <a:t>Noise floor:  </a:t>
             </a:r>
             <a:r>
-              <a:rPr lang="en-US" sz="1350" dirty="0">
+              <a:rPr lang="en-US" sz="1350">
                 <a:solidFill>
                   <a:srgbClr val="3C4043"/>
                 </a:solidFill>
@@ -16115,7 +16247,7 @@
               </a:rPr>
               <a:t>The low R squared is real outcome noise from crashes and retirements, reported plainly rather than hidden.</a:t>
             </a:r>
-            <a:endParaRPr lang="en-US" sz="1350" dirty="0">
+            <a:endParaRPr lang="en-US" sz="1350">
               <a:latin typeface="Arial"/>
               <a:cs typeface="Arial"/>
             </a:endParaRPr>
@@ -16324,7 +16456,7 @@
         <p:spPr>
           <a:xfrm>
             <a:off x="548640" y="1398814"/>
-            <a:ext cx="7863840" cy="640080"/>
+            <a:ext cx="7520940" cy="640080"/>
           </a:xfrm>
           <a:prstGeom prst="rect">
             <a:avLst/>
@@ -16346,156 +16478,6 @@
                 <a:cs typeface="Arial"/>
               </a:rPr>
               <a:t>Dataset: </a:t>
-            </a:r>
-            <a:r>
-              <a:rPr lang="en-US" sz="1400">
-                <a:solidFill>
-                  <a:srgbClr val="3C4043"/>
-                </a:solidFill>
-                <a:latin typeface="Arial"/>
-                <a:ea typeface="Arial" pitchFamily="34" charset="-122"/>
-                <a:cs typeface="Arial"/>
-              </a:rPr>
-              <a:t>96,336 laps from the 2022 to 2025 seasons, enriched with OpenF1 weather and stint data.</a:t>
-            </a:r>
-            <a:endParaRPr lang="en-US" sz="1400">
-              <a:latin typeface="Arial"/>
-              <a:cs typeface="Arial"/>
-            </a:endParaRPr>
-          </a:p>
-        </p:txBody>
-      </p:sp>
-      <p:sp>
-        <p:nvSpPr>
-          <p:cNvPr id="8" name="Text 5"/>
-          <p:cNvSpPr/>
-          <p:nvPr/>
-        </p:nvSpPr>
-        <p:spPr>
-          <a:xfrm>
-            <a:off x="548640" y="2043249"/>
-            <a:ext cx="7863840" cy="640080"/>
-          </a:xfrm>
-          <a:prstGeom prst="rect">
-            <a:avLst/>
-          </a:prstGeom>
-          <a:noFill/>
-          <a:ln/>
-        </p:spPr>
-        <p:txBody>
-          <a:bodyPr wrap="square" lIns="0" tIns="0" rIns="0" bIns="0" rtlCol="0" anchor="ctr"/>
-          <a:lstStyle/>
-          <a:p>
-            <a:r>
-              <a:rPr lang="en-US" sz="1400" b="1">
-                <a:solidFill>
-                  <a:srgbClr val="4C7A00"/>
-                </a:solidFill>
-                <a:latin typeface="Arial"/>
-                <a:ea typeface="Arial" pitchFamily="34" charset="-122"/>
-                <a:cs typeface="Arial"/>
-              </a:rPr>
-              <a:t>Scale:   </a:t>
-            </a:r>
-            <a:r>
-              <a:rPr lang="en-US" sz="1400">
-                <a:solidFill>
-                  <a:srgbClr val="3C4043"/>
-                </a:solidFill>
-                <a:latin typeface="Arial"/>
-                <a:ea typeface="Arial" pitchFamily="34" charset="-122"/>
-                <a:cs typeface="Arial"/>
-              </a:rPr>
-              <a:t>25 circuits, 31 drivers, about 660 driver races for the causal work and 3,436 stints for the clustering.</a:t>
-            </a:r>
-            <a:endParaRPr lang="en-US" sz="1400">
-              <a:latin typeface="Arial"/>
-              <a:cs typeface="Arial"/>
-            </a:endParaRPr>
-          </a:p>
-        </p:txBody>
-      </p:sp>
-      <p:sp>
-        <p:nvSpPr>
-          <p:cNvPr id="9" name="Text 6"/>
-          <p:cNvSpPr/>
-          <p:nvPr/>
-        </p:nvSpPr>
-        <p:spPr>
-          <a:xfrm>
-            <a:off x="548640" y="2683329"/>
-            <a:ext cx="7863840" cy="640080"/>
-          </a:xfrm>
-          <a:prstGeom prst="rect">
-            <a:avLst/>
-          </a:prstGeom>
-          <a:noFill/>
-          <a:ln/>
-        </p:spPr>
-        <p:txBody>
-          <a:bodyPr wrap="square" lIns="0" tIns="0" rIns="0" bIns="0" rtlCol="0" anchor="ctr"/>
-          <a:lstStyle/>
-          <a:p>
-            <a:r>
-              <a:rPr lang="en-US" sz="1400" b="1">
-                <a:solidFill>
-                  <a:srgbClr val="4C7A00"/>
-                </a:solidFill>
-                <a:latin typeface="Arial"/>
-                <a:ea typeface="Arial" pitchFamily="34" charset="-122"/>
-                <a:cs typeface="Arial"/>
-              </a:rPr>
-              <a:t>Unit:   </a:t>
-            </a:r>
-            <a:r>
-              <a:rPr lang="en-US" sz="1400">
-                <a:solidFill>
-                  <a:srgbClr val="3C4043"/>
-                </a:solidFill>
-                <a:latin typeface="Arial"/>
-                <a:ea typeface="Arial" pitchFamily="34" charset="-122"/>
-                <a:cs typeface="Arial"/>
-              </a:rPr>
-              <a:t>One lap, re-aggregated to driver and race, or to stint, depending on the question.</a:t>
-            </a:r>
-            <a:endParaRPr lang="en-US" sz="1400">
-              <a:latin typeface="Arial"/>
-              <a:cs typeface="Arial"/>
-            </a:endParaRPr>
-          </a:p>
-        </p:txBody>
-      </p:sp>
-      <p:sp>
-        <p:nvSpPr>
-          <p:cNvPr id="10" name="Text 7"/>
-          <p:cNvSpPr/>
-          <p:nvPr/>
-        </p:nvSpPr>
-        <p:spPr>
-          <a:xfrm>
-            <a:off x="548640" y="3492137"/>
-            <a:ext cx="7863840" cy="895894"/>
-          </a:xfrm>
-          <a:prstGeom prst="rect">
-            <a:avLst/>
-          </a:prstGeom>
-          <a:noFill/>
-          <a:ln/>
-        </p:spPr>
-        <p:txBody>
-          <a:bodyPr wrap="square" lIns="0" tIns="0" rIns="0" bIns="0" rtlCol="0" anchor="ctr"/>
-          <a:lstStyle/>
-          <a:p>
-            <a:r>
-              <a:rPr lang="en-US" sz="1400" b="1">
-                <a:solidFill>
-                  <a:srgbClr val="4C7A00"/>
-                </a:solidFill>
-                <a:latin typeface="Arial"/>
-                <a:ea typeface="Arial" pitchFamily="34" charset="-122"/>
-                <a:cs typeface="Arial"/>
-              </a:rPr>
-              <a:t>Three methodologies:  </a:t>
             </a:r>
             <a:endParaRPr lang="en-US" sz="1400">
               <a:solidFill>
@@ -16507,12 +16489,203 @@
             </a:endParaRPr>
           </a:p>
           <a:p>
+            <a:r>
+              <a:rPr lang="en-US" sz="1400">
+                <a:solidFill>
+                  <a:srgbClr val="3C4043"/>
+                </a:solidFill>
+                <a:latin typeface="Arial"/>
+                <a:ea typeface="Arial" pitchFamily="34" charset="-122"/>
+                <a:cs typeface="Arial"/>
+              </a:rPr>
+              <a:t>96,336 laps from the 2022 to 2025 seasons, enriched with OpenF1 weather and stint data.</a:t>
+            </a:r>
+            <a:endParaRPr lang="en-US" sz="1400">
+              <a:latin typeface="Arial"/>
+              <a:cs typeface="Arial"/>
+            </a:endParaRPr>
+          </a:p>
+        </p:txBody>
+      </p:sp>
+      <p:sp>
+        <p:nvSpPr>
+          <p:cNvPr id="8" name="Text 5"/>
+          <p:cNvSpPr/>
+          <p:nvPr/>
+        </p:nvSpPr>
+        <p:spPr>
+          <a:xfrm>
+            <a:off x="548640" y="2043249"/>
+            <a:ext cx="7863840" cy="640080"/>
+          </a:xfrm>
+          <a:prstGeom prst="rect">
+            <a:avLst/>
+          </a:prstGeom>
+          <a:noFill/>
+          <a:ln/>
+        </p:spPr>
+        <p:txBody>
+          <a:bodyPr wrap="square" lIns="0" tIns="0" rIns="0" bIns="0" rtlCol="0" anchor="ctr"/>
+          <a:lstStyle/>
+          <a:p>
+            <a:r>
+              <a:rPr lang="en-US" sz="1400" b="1">
+                <a:solidFill>
+                  <a:srgbClr val="4C7A00"/>
+                </a:solidFill>
+                <a:latin typeface="Arial"/>
+                <a:ea typeface="Arial" pitchFamily="34" charset="-122"/>
+                <a:cs typeface="Arial"/>
+              </a:rPr>
+              <a:t>Scale:</a:t>
+            </a:r>
+            <a:endParaRPr lang="en-US" sz="1400" dirty="0">
+              <a:solidFill>
+                <a:srgbClr val="000000"/>
+              </a:solidFill>
+              <a:latin typeface="Arial"/>
+              <a:ea typeface="Arial" pitchFamily="34" charset="-122"/>
+              <a:cs typeface="Arial"/>
+            </a:endParaRPr>
+          </a:p>
+          <a:p>
+            <a:r>
+              <a:rPr lang="en-US" sz="1400">
+                <a:solidFill>
+                  <a:srgbClr val="3C4043"/>
+                </a:solidFill>
+                <a:latin typeface="Arial"/>
+                <a:ea typeface="Arial" pitchFamily="34" charset="-122"/>
+                <a:cs typeface="Arial"/>
+              </a:rPr>
+              <a:t>25 circuits, 31 drivers, about 660 driver races for the causal work and 3,436 stints for the </a:t>
+            </a:r>
+            <a:r>
+              <a:rPr lang="en-US" sz="1400" dirty="0">
+                <a:solidFill>
+                  <a:srgbClr val="3C4043"/>
+                </a:solidFill>
+                <a:latin typeface="Arial"/>
+                <a:ea typeface="Arial" pitchFamily="34" charset="-122"/>
+                <a:cs typeface="Arial"/>
+              </a:rPr>
+              <a:t>clustering.</a:t>
+            </a:r>
+            <a:endParaRPr lang="en-US" sz="1400">
+              <a:latin typeface="Arial"/>
+              <a:cs typeface="Arial"/>
+            </a:endParaRPr>
+          </a:p>
+        </p:txBody>
+      </p:sp>
+      <p:sp>
+        <p:nvSpPr>
+          <p:cNvPr id="9" name="Text 6"/>
+          <p:cNvSpPr/>
+          <p:nvPr/>
+        </p:nvSpPr>
+        <p:spPr>
+          <a:xfrm>
+            <a:off x="548640" y="2683329"/>
+            <a:ext cx="7863840" cy="640080"/>
+          </a:xfrm>
+          <a:prstGeom prst="rect">
+            <a:avLst/>
+          </a:prstGeom>
+          <a:noFill/>
+          <a:ln/>
+        </p:spPr>
+        <p:txBody>
+          <a:bodyPr wrap="square" lIns="0" tIns="0" rIns="0" bIns="0" rtlCol="0" anchor="ctr"/>
+          <a:lstStyle/>
+          <a:p>
+            <a:r>
+              <a:rPr lang="en-US" sz="1400" b="1">
+                <a:solidFill>
+                  <a:srgbClr val="4C7A00"/>
+                </a:solidFill>
+                <a:latin typeface="Arial"/>
+                <a:ea typeface="Arial" pitchFamily="34" charset="-122"/>
+                <a:cs typeface="Arial"/>
+              </a:rPr>
+              <a:t>Unit:</a:t>
+            </a:r>
+            <a:endParaRPr lang="en-US" sz="1400">
+              <a:solidFill>
+                <a:srgbClr val="000000"/>
+              </a:solidFill>
+              <a:latin typeface="Arial"/>
+              <a:ea typeface="Arial" pitchFamily="34" charset="-122"/>
+              <a:cs typeface="Arial"/>
+            </a:endParaRPr>
+          </a:p>
+          <a:p>
+            <a:r>
+              <a:rPr lang="en-US" sz="1400">
+                <a:solidFill>
+                  <a:srgbClr val="3C4043"/>
+                </a:solidFill>
+                <a:latin typeface="Arial"/>
+                <a:ea typeface="Arial" pitchFamily="34" charset="-122"/>
+                <a:cs typeface="Arial"/>
+              </a:rPr>
+              <a:t>One lap, re-aggregated to driver and race, or to stint, depending on the question.</a:t>
+            </a:r>
+            <a:endParaRPr lang="en-US" sz="1400">
+              <a:latin typeface="Arial"/>
+              <a:cs typeface="Arial"/>
+            </a:endParaRPr>
+          </a:p>
+        </p:txBody>
+      </p:sp>
+      <p:sp>
+        <p:nvSpPr>
+          <p:cNvPr id="10" name="Text 7"/>
+          <p:cNvSpPr/>
+          <p:nvPr/>
+        </p:nvSpPr>
+        <p:spPr>
+          <a:xfrm>
+            <a:off x="548640" y="3492137"/>
+            <a:ext cx="7863840" cy="895894"/>
+          </a:xfrm>
+          <a:prstGeom prst="rect">
+            <a:avLst/>
+          </a:prstGeom>
+          <a:noFill/>
+          <a:ln/>
+        </p:spPr>
+        <p:txBody>
+          <a:bodyPr wrap="square" lIns="0" tIns="0" rIns="0" bIns="0" rtlCol="0" anchor="ctr"/>
+          <a:lstStyle/>
+          <a:p>
+            <a:r>
+              <a:rPr lang="en-US" sz="1400" b="1">
+                <a:solidFill>
+                  <a:srgbClr val="4C7A00"/>
+                </a:solidFill>
+                <a:latin typeface="Arial"/>
+                <a:ea typeface="Arial" pitchFamily="34" charset="-122"/>
+                <a:cs typeface="Arial"/>
+              </a:rPr>
+              <a:t>Three methodologies:  </a:t>
+            </a:r>
+            <a:endParaRPr lang="en-US" sz="1400">
+              <a:solidFill>
+                <a:srgbClr val="000000"/>
+              </a:solidFill>
+              <a:latin typeface="Arial"/>
+              <a:ea typeface="Arial" pitchFamily="34" charset="-122"/>
+              <a:cs typeface="Arial"/>
+            </a:endParaRPr>
+          </a:p>
+          <a:p>
             <a:pPr marL="285750" indent="-285750">
               <a:buFont typeface="Arial"/>
               <a:buChar char="•"/>
             </a:pPr>
             <a:r>
-              <a:rPr lang="en-US" sz="1400" b="1" dirty="0">
+              <a:rPr lang="en-US" sz="1400" b="1">
                 <a:solidFill>
                   <a:srgbClr val="3C4043"/>
                 </a:solidFill>
@@ -16523,7 +16696,7 @@
               <a:t>Causal block</a:t>
             </a:r>
             <a:r>
-              <a:rPr lang="en-US" sz="1400" dirty="0">
+              <a:rPr lang="en-US" sz="1400">
                 <a:solidFill>
                   <a:srgbClr val="3C4043"/>
                 </a:solidFill>
@@ -16534,7 +16707,7 @@
               <a:t> (</a:t>
             </a:r>
             <a:r>
-              <a:rPr lang="en-US" sz="1400" dirty="0" err="1">
+              <a:rPr lang="en-US" sz="1400" err="1">
                 <a:solidFill>
                   <a:srgbClr val="3C4043"/>
                 </a:solidFill>
@@ -16545,7 +16718,7 @@
               <a:t>DoWhy</a:t>
             </a:r>
             <a:r>
-              <a:rPr lang="en-US" sz="1400" dirty="0">
+              <a:rPr lang="en-US" sz="1400">
                 <a:solidFill>
                   <a:srgbClr val="3C4043"/>
                 </a:solidFill>
@@ -16555,7 +16728,7 @@
               </a:rPr>
               <a:t>, fixed effects, Double Machine Learning)</a:t>
             </a:r>
-            <a:endParaRPr lang="en-US" sz="1400" dirty="0">
+            <a:endParaRPr lang="en-US" sz="1400">
               <a:solidFill>
                 <a:srgbClr val="000000"/>
               </a:solidFill>
@@ -17161,7 +17334,7 @@
               <a:buChar char="•"/>
             </a:pPr>
             <a:r>
-              <a:rPr lang="en-US" sz="1200" dirty="0">
+              <a:rPr lang="en-US" sz="1200">
                 <a:solidFill>
                   <a:srgbClr val="36393B"/>
                 </a:solidFill>
@@ -17169,18 +17342,7 @@
                 <a:ea typeface="+mn-lt"/>
                 <a:cs typeface="Arial"/>
               </a:rPr>
-              <a:t>Variables with no usable information (Safety Car, VSC and OpenF1 pit </a:t>
-            </a:r>
-            <a:r>
-              <a:rPr lang="en-US" sz="1200">
-                <a:solidFill>
-                  <a:srgbClr val="36393B"/>
-                </a:solidFill>
-                <a:latin typeface="Arial"/>
-                <a:ea typeface="+mn-lt"/>
-                <a:cs typeface="Arial"/>
-              </a:rPr>
-              <a:t>duration) are dropped.</a:t>
+              <a:t>Variables with no usable information (Safety Car, VSC and OpenF1 pit duration) are dropped.</a:t>
             </a:r>
             <a:endParaRPr lang="en-US" sz="1200">
               <a:solidFill>
@@ -17205,29 +17367,7 @@
                 <a:ea typeface="+mn-lt"/>
                 <a:cs typeface="Arial"/>
               </a:rPr>
-              <a:t>Wet-weather laps are </a:t>
-            </a:r>
-            <a:r>
-              <a:rPr lang="en-US" sz="1200" dirty="0">
-                <a:solidFill>
-                  <a:srgbClr val="36393B"/>
-                </a:solidFill>
-                <a:latin typeface="Arial"/>
-                <a:ea typeface="+mn-lt"/>
-                <a:cs typeface="Arial"/>
-              </a:rPr>
-              <a:t>removed, while complete weather and grid variables are </a:t>
-            </a:r>
-            <a:r>
-              <a:rPr lang="en-US" sz="1200">
-                <a:solidFill>
-                  <a:srgbClr val="36393B"/>
-                </a:solidFill>
-                <a:latin typeface="Arial"/>
-                <a:ea typeface="+mn-lt"/>
-                <a:cs typeface="Arial"/>
-              </a:rPr>
-              <a:t>retained.</a:t>
+              <a:t>Wet-weather laps are removed, while complete weather and grid variables are retained.</a:t>
             </a:r>
             <a:endParaRPr lang="en-US" sz="1200">
               <a:solidFill>
@@ -17266,7 +17406,7 @@
               <a:t>tyre</a:t>
             </a:r>
             <a:r>
-              <a:rPr lang="en-US" sz="1200" dirty="0">
+              <a:rPr lang="en-US" sz="1200">
                 <a:solidFill>
                   <a:srgbClr val="36393B"/>
                 </a:solidFill>
@@ -17551,14 +17691,16 @@
                 <a:solidFill>
                   <a:srgbClr val="36393B"/>
                 </a:solidFill>
+                <a:latin typeface="Arial"/>
                 <a:ea typeface="+mn-lt"/>
-                <a:cs typeface="+mn-lt"/>
+                <a:cs typeface="Arial"/>
               </a:rPr>
               <a:t>The selected predictors exhibit limited multicollinearity, supporting their joint use in the models.</a:t>
             </a:r>
             <a:endParaRPr lang="en-US">
+              <a:latin typeface="Arial"/>
               <a:ea typeface="+mn-lt"/>
-              <a:cs typeface="+mn-lt"/>
+              <a:cs typeface="Arial"/>
             </a:endParaRPr>
           </a:p>
         </p:txBody>
@@ -17876,7 +18018,7 @@
               <a:buChar char="•"/>
             </a:pPr>
             <a:r>
-              <a:rPr lang="en-US" sz="1200" kern="0" spc="100" dirty="0" err="1">
+              <a:rPr lang="en-US" sz="1200" kern="0" spc="100" err="1">
                 <a:solidFill>
                   <a:schemeClr val="tx1">
                     <a:lumMod val="85000"/>
@@ -17890,7 +18032,7 @@
               <a:t>Tyre</a:t>
             </a:r>
             <a:r>
-              <a:rPr lang="en-US" sz="1200" kern="0" spc="100" dirty="0">
+              <a:rPr lang="en-US" sz="1200" kern="0" spc="100">
                 <a:solidFill>
                   <a:schemeClr val="tx1">
                     <a:lumMod val="85000"/>
@@ -17904,7 +18046,7 @@
               <a:t> degradation increases as </a:t>
             </a:r>
             <a:r>
-              <a:rPr lang="en-US" sz="1200" kern="0" spc="100" dirty="0" err="1">
+              <a:rPr lang="en-US" sz="1200" kern="0" spc="100" err="1">
                 <a:solidFill>
                   <a:schemeClr val="tx1">
                     <a:lumMod val="85000"/>
@@ -17918,7 +18060,7 @@
               <a:t>tyres</a:t>
             </a:r>
             <a:r>
-              <a:rPr lang="en-US" sz="1200" kern="0" spc="100" dirty="0">
+              <a:rPr lang="en-US" sz="1200" kern="0" spc="100">
                 <a:solidFill>
                   <a:schemeClr val="tx1">
                     <a:lumMod val="85000"/>
@@ -18253,7 +18395,7 @@
           <a:lstStyle/>
           <a:p>
             <a:r>
-              <a:rPr lang="en-US" sz="1000" b="1" kern="0" spc="100">
+              <a:rPr lang="en-US" sz="1200" b="1" kern="0" spc="100" dirty="0">
                 <a:solidFill>
                   <a:srgbClr val="4C7A00"/>
                 </a:solidFill>
@@ -18264,7 +18406,7 @@
               <a:t> </a:t>
             </a:r>
             <a:r>
-              <a:rPr lang="en-US" sz="1200" kern="0" spc="100">
+              <a:rPr lang="en-US" sz="1200" kern="0" spc="100" dirty="0">
                 <a:solidFill>
                   <a:schemeClr val="tx1">
                     <a:lumMod val="85000"/>
@@ -18278,7 +18420,7 @@
               <a:t>Hard and medium compounds account for most laps, while soft </a:t>
             </a:r>
             <a:r>
-              <a:rPr lang="en-US" sz="1200" kern="0" spc="100" err="1">
+              <a:rPr lang="en-US" sz="1200" kern="0" spc="100" dirty="0" err="1">
                 <a:solidFill>
                   <a:schemeClr val="tx1">
                     <a:lumMod val="85000"/>
@@ -18292,7 +18434,7 @@
               <a:t>tyres</a:t>
             </a:r>
             <a:r>
-              <a:rPr lang="en-US" sz="1200" kern="0" spc="100">
+              <a:rPr lang="en-US" sz="1200" kern="0" spc="100" dirty="0">
                 <a:solidFill>
                   <a:schemeClr val="tx1">
                     <a:lumMod val="85000"/>
